--- a/slides/datasets-in-10-minutes-scicode.pptx
+++ b/slides/datasets-in-10-minutes-scicode.pptx
@@ -7876,7 +7876,7 @@
         </p:nvSpPr>
         <p:spPr>
           <a:xfrm>
-            <a:off x="594360" y="1417320"/>
+            <a:off x="594360" y="1659766"/>
             <a:ext cx="7955279" cy="201168"/>
           </a:xfrm>
           <a:prstGeom prst="rect">
@@ -7930,7 +7930,7 @@
         </p:nvSpPr>
         <p:spPr>
           <a:xfrm>
-            <a:off x="594360" y="1773936"/>
+            <a:off x="594360" y="1949725"/>
             <a:ext cx="7955279" cy="1463040"/>
           </a:xfrm>
           <a:prstGeom prst="rect">
@@ -7984,7 +7984,7 @@
         </p:nvSpPr>
         <p:spPr>
           <a:xfrm>
-            <a:off x="594360" y="3429000"/>
+            <a:off x="594360" y="3120778"/>
             <a:ext cx="7955279" cy="1051560"/>
           </a:xfrm>
           <a:prstGeom prst="rect">
@@ -8746,7 +8746,7 @@
         </p:nvSpPr>
         <p:spPr>
           <a:xfrm>
-            <a:off x="594360" y="1417320"/>
+            <a:off x="594360" y="2012439"/>
             <a:ext cx="7955279" cy="201168"/>
           </a:xfrm>
           <a:prstGeom prst="rect">
@@ -8800,7 +8800,7 @@
         </p:nvSpPr>
         <p:spPr>
           <a:xfrm>
-            <a:off x="594360" y="1773936"/>
+            <a:off x="594360" y="2302398"/>
             <a:ext cx="7955279" cy="1463040"/>
           </a:xfrm>
           <a:prstGeom prst="rect">
@@ -8854,7 +8854,7 @@
         </p:nvSpPr>
         <p:spPr>
           <a:xfrm>
-            <a:off x="594360" y="3429000"/>
+            <a:off x="594360" y="3144406"/>
             <a:ext cx="7955279" cy="1051560"/>
           </a:xfrm>
           <a:prstGeom prst="rect">
@@ -12624,7 +12624,7 @@
                 <a:ea typeface="Noto Sans CJK JP"/>
                 <a:cs typeface="Noto Sans"/>
               </a:rPr>
-              <a:t>SciCodeの公式配布ページ</a:t>
+              <a:t>SciCodeの公式サイト</a:t>
             </a:r>
           </a:p>
         </p:txBody>
@@ -12672,35 +12672,11 @@
                 <a:ea typeface="Noto Sans CJK JP"/>
                 <a:cs typeface="Noto Sans"/>
               </a:rPr>
-              <a:t>SciCode: 公開データ</a:t>
+              <a:t>SciCode: 公式サイト</a:t>
             </a:r>
           </a:p>
         </p:txBody>
       </p:sp>
-      <p:pic>
-        <p:nvPicPr>
-          <p:cNvPr id="4" name="Picture 3" descr="dataset-page.png"/>
-          <p:cNvPicPr>
-            <a:picLocks noChangeAspect="1"/>
-          </p:cNvPicPr>
-          <p:nvPr/>
-        </p:nvPicPr>
-        <p:blipFill>
-          <a:blip r:embed="rId2"/>
-          <a:stretch>
-            <a:fillRect/>
-          </a:stretch>
-        </p:blipFill>
-        <p:spPr>
-          <a:xfrm>
-            <a:off x="2274570" y="1481328"/>
-            <a:ext cx="4594859" cy="3063240"/>
-          </a:xfrm>
-          <a:prstGeom prst="rect">
-            <a:avLst/>
-          </a:prstGeom>
-        </p:spPr>
-      </p:pic>
       <p:sp>
         <p:nvSpPr>
           <p:cNvPr id="5" name="TextBox 4"/>
@@ -12725,7 +12701,7 @@
           <a:p>
             <a:pPr algn="l">
               <a:lnSpc>
-                <a:spcPct val="112000"/>
+                <a:spcPct val="110000"/>
               </a:lnSpc>
               <a:spcBef>
                 <a:spcPts val="0"/>
@@ -12742,53 +12718,42 @@
               </a:defRPr>
             </a:pPr>
             <a:r>
-              <a:rPr sz="810" b="0" lang="ja-JP" altLang="en-US">
+              <a:rPr sz="1000">
                 <a:solidFill>
                   <a:srgbClr val="626669"/>
                 </a:solidFill>
                 <a:latin typeface="Noto Sans"/>
-                <a:ea typeface="Noto Sans CJK JP"/>
-                <a:cs typeface="Noto Sans"/>
-              </a:rPr>
-              <a:t/>
-            </a:r>
-            <a:r>
-              <a:rPr sz="810" b="0" lang="ja-JP" altLang="en-US">
-                <a:solidFill>
-                  <a:srgbClr val="626669"/>
-                </a:solidFill>
-                <a:latin typeface="Noto Sans"/>
-                <a:ea typeface="Noto Sans CJK JP"/>
-                <a:cs typeface="Noto Sans"/>
-              </a:rPr>
-              <a:t>SciCode team. SciCode. Hugging Face公式配布ページ。2026-10-16参照。</a:t>
-            </a:r>
-            <a:r>
-              <a:rPr sz="810" b="0" lang="ja-JP" altLang="en-US">
-                <a:solidFill>
-                  <a:srgbClr val="626669"/>
-                </a:solidFill>
-                <a:latin typeface="Noto Sans"/>
-                <a:ea typeface="Noto Sans CJK JP"/>
-                <a:cs typeface="Noto Sans"/>
-              </a:rPr>
-              <a:t>  </a:t>
-            </a:r>
-            <a:r>
-              <a:rPr sz="810" b="0" lang="ja-JP" altLang="en-US">
-                <a:solidFill>
-                  <a:srgbClr val="626669"/>
-                </a:solidFill>
-                <a:latin typeface="Noto Sans"/>
-                <a:ea typeface="Noto Sans CJK JP"/>
-                <a:cs typeface="Noto Sans"/>
-                <a:hlinkClick r:id="rId3"/>
-              </a:rPr>
-              <a:t>https://huggingface.co/datasets/SciCode1/SciCode</a:t>
+                <a:hlinkClick r:id="rId5"/>
+              </a:rPr>
+              <a:t>https://scicode-bench.github.io/</a:t>
             </a:r>
           </a:p>
         </p:txBody>
       </p:sp>
+      <p:pic>
+        <p:nvPicPr>
+          <p:cNvPr id="6" name="公式サイトの画面" descr="image.png"/>
+          <p:cNvPicPr>
+            <a:picLocks noChangeAspect="1"/>
+          </p:cNvPicPr>
+          <p:nvPr/>
+        </p:nvPicPr>
+        <p:blipFill>
+          <a:blip r:embed="rId4"/>
+          <a:stretch>
+            <a:fillRect/>
+          </a:stretch>
+        </p:blipFill>
+        <p:spPr>
+          <a:xfrm>
+            <a:off x="2274570" y="1481328"/>
+            <a:ext cx="4594858" cy="3063239"/>
+          </a:xfrm>
+          <a:prstGeom prst="rect">
+            <a:avLst/>
+          </a:prstGeom>
+        </p:spPr>
+      </p:pic>
     </p:spTree>
   </p:cSld>
   <p:clrMapOvr>
@@ -20329,14 +20294,14 @@
       </p:sp>
       <p:sp>
         <p:nvSpPr>
-          <p:cNvPr id="4" name="Rectangle 3"/>
+          <p:cNvPr id="8" name="コード背景"/>
           <p:cNvSpPr/>
           <p:nvPr/>
         </p:nvSpPr>
         <p:spPr>
           <a:xfrm>
-            <a:off x="548640" y="2211199"/>
-            <a:ext cx="8046720" cy="714375"/>
+            <a:off x="548640" y="2348729"/>
+            <a:ext cx="8046720" cy="692692"/>
           </a:xfrm>
           <a:prstGeom prst="rect">
             <a:avLst/>
@@ -20364,6 +20329,48 @@
           </a:fontRef>
         </p:style>
         <p:txBody>
+          <a:bodyPr rtlCol="0" anchor="ctr"/>
+          <a:lstStyle/>
+          <a:p>
+            <a:pPr algn="ctr"/>
+          </a:p>
+        </p:txBody>
+      </p:sp>
+      <p:sp>
+        <p:nvSpPr>
+          <p:cNvPr id="4" name="Rectangle 3"/>
+          <p:cNvSpPr/>
+          <p:nvPr/>
+        </p:nvSpPr>
+        <p:spPr>
+          <a:xfrm>
+            <a:off x="548640" y="2343337"/>
+            <a:ext cx="8046720" cy="540554"/>
+          </a:xfrm>
+          <a:prstGeom prst="rect">
+            <a:avLst/>
+          </a:prstGeom>
+          <a:noFill/>
+          <a:ln>
+            <a:noFill/>
+          </a:ln>
+          <a:effectLst/>
+        </p:spPr>
+        <p:style>
+          <a:lnRef idx="1">
+            <a:schemeClr val="accent1"/>
+          </a:lnRef>
+          <a:fillRef idx="3">
+            <a:schemeClr val="accent1"/>
+          </a:fillRef>
+          <a:effectRef idx="0">
+            <a:schemeClr val="accent1"/>
+          </a:effectRef>
+          <a:fontRef idx="minor">
+            <a:schemeClr val="lt1"/>
+          </a:fontRef>
+        </p:style>
+        <p:txBody>
           <a:bodyPr rtlCol="0" anchor="t" wrap="none" lIns="152400" rIns="152400" tIns="92710" bIns="127000"/>
           <a:lstStyle/>
           <a:p>
@@ -20438,7 +20445,7 @@
         </p:nvSpPr>
         <p:spPr>
           <a:xfrm>
-            <a:off x="594360" y="3126742"/>
+            <a:off x="594360" y="3183602"/>
             <a:ext cx="7955279" cy="777240"/>
           </a:xfrm>
           <a:prstGeom prst="rect">
@@ -20580,7 +20587,7 @@
         </p:nvSpPr>
         <p:spPr>
           <a:xfrm>
-            <a:off x="594360" y="2010031"/>
+            <a:off x="594360" y="2054928"/>
             <a:ext cx="7955279" cy="164592"/>
           </a:xfrm>
           <a:prstGeom prst="rect">
@@ -20742,14 +20749,14 @@
       </p:sp>
       <p:sp>
         <p:nvSpPr>
-          <p:cNvPr id="4" name="Rectangle 3"/>
+          <p:cNvPr id="8" name="コード背景"/>
           <p:cNvSpPr/>
           <p:nvPr/>
         </p:nvSpPr>
         <p:spPr>
           <a:xfrm>
-            <a:off x="548640" y="2037203"/>
-            <a:ext cx="8046720" cy="1063625"/>
+            <a:off x="548640" y="2176215"/>
+            <a:ext cx="8046720" cy="1038505"/>
           </a:xfrm>
           <a:prstGeom prst="rect">
             <a:avLst/>
@@ -20777,6 +20784,48 @@
           </a:fontRef>
         </p:style>
         <p:txBody>
+          <a:bodyPr rtlCol="0" anchor="ctr"/>
+          <a:lstStyle/>
+          <a:p>
+            <a:pPr algn="ctr"/>
+          </a:p>
+        </p:txBody>
+      </p:sp>
+      <p:sp>
+        <p:nvSpPr>
+          <p:cNvPr id="4" name="Rectangle 3"/>
+          <p:cNvSpPr/>
+          <p:nvPr/>
+        </p:nvSpPr>
+        <p:spPr>
+          <a:xfrm>
+            <a:off x="548640" y="2163431"/>
+            <a:ext cx="8046720" cy="899892"/>
+          </a:xfrm>
+          <a:prstGeom prst="rect">
+            <a:avLst/>
+          </a:prstGeom>
+          <a:noFill/>
+          <a:ln>
+            <a:noFill/>
+          </a:ln>
+          <a:effectLst/>
+        </p:spPr>
+        <p:style>
+          <a:lnRef idx="1">
+            <a:schemeClr val="accent1"/>
+          </a:lnRef>
+          <a:fillRef idx="3">
+            <a:schemeClr val="accent1"/>
+          </a:fillRef>
+          <a:effectRef idx="0">
+            <a:schemeClr val="accent1"/>
+          </a:effectRef>
+          <a:fontRef idx="minor">
+            <a:schemeClr val="lt1"/>
+          </a:fontRef>
+        </p:style>
+        <p:txBody>
           <a:bodyPr rtlCol="0" anchor="t" wrap="none" lIns="152400" rIns="152400" tIns="92710" bIns="127000"/>
           <a:lstStyle/>
           <a:p>
@@ -20882,7 +20931,7 @@
         </p:nvSpPr>
         <p:spPr>
           <a:xfrm>
-            <a:off x="594360" y="3301996"/>
+            <a:off x="594360" y="3357055"/>
             <a:ext cx="7955279" cy="777240"/>
           </a:xfrm>
           <a:prstGeom prst="rect">
@@ -21024,7 +21073,7 @@
         </p:nvSpPr>
         <p:spPr>
           <a:xfrm>
-            <a:off x="594360" y="1836035"/>
+            <a:off x="594360" y="1882491"/>
             <a:ext cx="7955279" cy="164592"/>
           </a:xfrm>
           <a:prstGeom prst="rect">
@@ -21186,14 +21235,14 @@
       </p:sp>
       <p:sp>
         <p:nvSpPr>
-          <p:cNvPr id="4" name="Rectangle 3"/>
+          <p:cNvPr id="8" name="コード背景"/>
           <p:cNvSpPr/>
           <p:nvPr/>
         </p:nvSpPr>
         <p:spPr>
           <a:xfrm>
-            <a:off x="548640" y="1927405"/>
-            <a:ext cx="8046720" cy="944562"/>
+            <a:off x="548640" y="2233528"/>
+            <a:ext cx="8046720" cy="922727"/>
           </a:xfrm>
           <a:prstGeom prst="rect">
             <a:avLst/>
@@ -21221,6 +21270,48 @@
           </a:fontRef>
         </p:style>
         <p:txBody>
+          <a:bodyPr rtlCol="0" anchor="ctr"/>
+          <a:lstStyle/>
+          <a:p>
+            <a:pPr algn="ctr"/>
+          </a:p>
+        </p:txBody>
+      </p:sp>
+      <p:sp>
+        <p:nvSpPr>
+          <p:cNvPr id="4" name="Rectangle 3"/>
+          <p:cNvSpPr/>
+          <p:nvPr/>
+        </p:nvSpPr>
+        <p:spPr>
+          <a:xfrm>
+            <a:off x="548640" y="2228206"/>
+            <a:ext cx="8046720" cy="602053"/>
+          </a:xfrm>
+          <a:prstGeom prst="rect">
+            <a:avLst/>
+          </a:prstGeom>
+          <a:noFill/>
+          <a:ln>
+            <a:noFill/>
+          </a:ln>
+          <a:effectLst/>
+        </p:spPr>
+        <p:style>
+          <a:lnRef idx="1">
+            <a:schemeClr val="accent1"/>
+          </a:lnRef>
+          <a:fillRef idx="3">
+            <a:schemeClr val="accent1"/>
+          </a:fillRef>
+          <a:effectRef idx="0">
+            <a:schemeClr val="accent1"/>
+          </a:effectRef>
+          <a:fontRef idx="minor">
+            <a:schemeClr val="lt1"/>
+          </a:fontRef>
+        </p:style>
+        <p:txBody>
           <a:bodyPr rtlCol="0" anchor="t" wrap="none" lIns="152400" rIns="152400" tIns="92710" bIns="127000"/>
           <a:lstStyle/>
           <a:p>
@@ -21326,7 +21417,7 @@
         </p:nvSpPr>
         <p:spPr>
           <a:xfrm>
-            <a:off x="594360" y="3073135"/>
+            <a:off x="594360" y="3298658"/>
             <a:ext cx="7955279" cy="777240"/>
           </a:xfrm>
           <a:prstGeom prst="rect">
@@ -21468,7 +21559,7 @@
         </p:nvSpPr>
         <p:spPr>
           <a:xfrm>
-            <a:off x="594360" y="1726237"/>
+            <a:off x="594360" y="1939796"/>
             <a:ext cx="7955279" cy="164592"/>
           </a:xfrm>
           <a:prstGeom prst="rect">
@@ -21744,14 +21835,14 @@
       </p:sp>
       <p:sp>
         <p:nvSpPr>
-          <p:cNvPr id="4" name="Rectangle 3"/>
+          <p:cNvPr id="8" name="コード背景"/>
           <p:cNvSpPr/>
           <p:nvPr/>
         </p:nvSpPr>
         <p:spPr>
           <a:xfrm>
-            <a:off x="548640" y="1787184"/>
-            <a:ext cx="8046720" cy="1563687"/>
+            <a:off x="548640" y="1926714"/>
+            <a:ext cx="8046720" cy="1538068"/>
           </a:xfrm>
           <a:prstGeom prst="rect">
             <a:avLst/>
@@ -21779,6 +21870,48 @@
           </a:fontRef>
         </p:style>
         <p:txBody>
+          <a:bodyPr rtlCol="0" anchor="ctr"/>
+          <a:lstStyle/>
+          <a:p>
+            <a:pPr algn="ctr"/>
+          </a:p>
+        </p:txBody>
+      </p:sp>
+      <p:sp>
+        <p:nvSpPr>
+          <p:cNvPr id="4" name="Rectangle 3"/>
+          <p:cNvSpPr/>
+          <p:nvPr/>
+        </p:nvSpPr>
+        <p:spPr>
+          <a:xfrm>
+            <a:off x="548640" y="1915652"/>
+            <a:ext cx="8046720" cy="1395206"/>
+          </a:xfrm>
+          <a:prstGeom prst="rect">
+            <a:avLst/>
+          </a:prstGeom>
+          <a:noFill/>
+          <a:ln>
+            <a:noFill/>
+          </a:ln>
+          <a:effectLst/>
+        </p:spPr>
+        <p:style>
+          <a:lnRef idx="1">
+            <a:schemeClr val="accent1"/>
+          </a:lnRef>
+          <a:fillRef idx="3">
+            <a:schemeClr val="accent1"/>
+          </a:fillRef>
+          <a:effectRef idx="0">
+            <a:schemeClr val="accent1"/>
+          </a:effectRef>
+          <a:fontRef idx="minor">
+            <a:schemeClr val="lt1"/>
+          </a:fontRef>
+        </p:style>
+        <p:txBody>
           <a:bodyPr rtlCol="0" anchor="t" wrap="none" lIns="152400" rIns="152400" tIns="92710" bIns="127000"/>
           <a:lstStyle/>
           <a:p>
@@ -21946,7 +22079,7 @@
         </p:nvSpPr>
         <p:spPr>
           <a:xfrm>
-            <a:off x="594360" y="3552039"/>
+            <a:off x="594360" y="3606670"/>
             <a:ext cx="7955279" cy="777240"/>
           </a:xfrm>
           <a:prstGeom prst="rect">
@@ -22088,7 +22221,7 @@
         </p:nvSpPr>
         <p:spPr>
           <a:xfrm>
-            <a:off x="594360" y="1586016"/>
+            <a:off x="594360" y="1632544"/>
             <a:ext cx="7955279" cy="164592"/>
           </a:xfrm>
           <a:prstGeom prst="rect">
@@ -22250,14 +22383,14 @@
       </p:sp>
       <p:sp>
         <p:nvSpPr>
-          <p:cNvPr id="4" name="Rectangle 3"/>
+          <p:cNvPr id="8" name="コード背景"/>
           <p:cNvSpPr/>
           <p:nvPr/>
         </p:nvSpPr>
         <p:spPr>
           <a:xfrm>
-            <a:off x="548640" y="2072242"/>
-            <a:ext cx="8046720" cy="992187"/>
+            <a:off x="548640" y="2211161"/>
+            <a:ext cx="8046720" cy="968676"/>
           </a:xfrm>
           <a:prstGeom prst="rect">
             <a:avLst/>
@@ -22285,6 +22418,48 @@
           </a:fontRef>
         </p:style>
         <p:txBody>
+          <a:bodyPr rtlCol="0" anchor="ctr"/>
+          <a:lstStyle/>
+          <a:p>
+            <a:pPr algn="ctr"/>
+          </a:p>
+        </p:txBody>
+      </p:sp>
+      <p:sp>
+        <p:nvSpPr>
+          <p:cNvPr id="4" name="Rectangle 3"/>
+          <p:cNvSpPr/>
+          <p:nvPr/>
+        </p:nvSpPr>
+        <p:spPr>
+          <a:xfrm>
+            <a:off x="548640" y="2202515"/>
+            <a:ext cx="8046720" cy="821240"/>
+          </a:xfrm>
+          <a:prstGeom prst="rect">
+            <a:avLst/>
+          </a:prstGeom>
+          <a:noFill/>
+          <a:ln>
+            <a:noFill/>
+          </a:ln>
+          <a:effectLst/>
+        </p:spPr>
+        <p:style>
+          <a:lnRef idx="1">
+            <a:schemeClr val="accent1"/>
+          </a:lnRef>
+          <a:fillRef idx="3">
+            <a:schemeClr val="accent1"/>
+          </a:fillRef>
+          <a:effectRef idx="0">
+            <a:schemeClr val="accent1"/>
+          </a:effectRef>
+          <a:fontRef idx="minor">
+            <a:schemeClr val="lt1"/>
+          </a:fontRef>
+        </p:style>
+        <p:txBody>
           <a:bodyPr rtlCol="0" anchor="t" wrap="none" lIns="152400" rIns="152400" tIns="92710" bIns="127000"/>
           <a:lstStyle/>
           <a:p>
@@ -22390,7 +22565,7 @@
         </p:nvSpPr>
         <p:spPr>
           <a:xfrm>
-            <a:off x="594360" y="3265597"/>
+            <a:off x="594360" y="3321493"/>
             <a:ext cx="7955279" cy="777240"/>
           </a:xfrm>
           <a:prstGeom prst="rect">
@@ -22532,7 +22707,7 @@
         </p:nvSpPr>
         <p:spPr>
           <a:xfrm>
-            <a:off x="594360" y="1871074"/>
+            <a:off x="594360" y="1916923"/>
             <a:ext cx="7955279" cy="164592"/>
           </a:xfrm>
           <a:prstGeom prst="rect">
@@ -22694,14 +22869,14 @@
       </p:sp>
       <p:sp>
         <p:nvSpPr>
-          <p:cNvPr id="4" name="Rectangle 3"/>
+          <p:cNvPr id="8" name="コード背景"/>
           <p:cNvSpPr/>
           <p:nvPr/>
         </p:nvSpPr>
         <p:spPr>
           <a:xfrm>
-            <a:off x="548640" y="1515913"/>
-            <a:ext cx="8046720" cy="1976437"/>
+            <a:off x="548640" y="1562445"/>
+            <a:ext cx="8046720" cy="1952190"/>
           </a:xfrm>
           <a:prstGeom prst="rect">
             <a:avLst/>
@@ -22729,6 +22904,48 @@
           </a:fontRef>
         </p:style>
         <p:txBody>
+          <a:bodyPr rtlCol="0" anchor="ctr"/>
+          <a:lstStyle/>
+          <a:p>
+            <a:pPr algn="ctr"/>
+          </a:p>
+        </p:txBody>
+      </p:sp>
+      <p:sp>
+        <p:nvSpPr>
+          <p:cNvPr id="4" name="Rectangle 3"/>
+          <p:cNvSpPr/>
+          <p:nvPr/>
+        </p:nvSpPr>
+        <p:spPr>
+          <a:xfrm>
+            <a:off x="548640" y="1553997"/>
+            <a:ext cx="8046720" cy="1897087"/>
+          </a:xfrm>
+          <a:prstGeom prst="rect">
+            <a:avLst/>
+          </a:prstGeom>
+          <a:noFill/>
+          <a:ln>
+            <a:noFill/>
+          </a:ln>
+          <a:effectLst/>
+        </p:spPr>
+        <p:style>
+          <a:lnRef idx="1">
+            <a:schemeClr val="accent1"/>
+          </a:lnRef>
+          <a:fillRef idx="3">
+            <a:schemeClr val="accent1"/>
+          </a:fillRef>
+          <a:effectRef idx="0">
+            <a:schemeClr val="accent1"/>
+          </a:effectRef>
+          <a:fontRef idx="minor">
+            <a:schemeClr val="lt1"/>
+          </a:fontRef>
+        </p:style>
+        <p:txBody>
           <a:bodyPr rtlCol="0" anchor="t" wrap="none" lIns="152400" rIns="152400" tIns="92710" bIns="127000"/>
           <a:lstStyle/>
           <a:p>
@@ -22958,7 +23175,7 @@
         </p:nvSpPr>
         <p:spPr>
           <a:xfrm>
-            <a:off x="594360" y="3693518"/>
+            <a:off x="594360" y="3656514"/>
             <a:ext cx="7955279" cy="777240"/>
           </a:xfrm>
           <a:prstGeom prst="rect">
@@ -23262,14 +23479,14 @@
       </p:sp>
       <p:sp>
         <p:nvSpPr>
-          <p:cNvPr id="4" name="Rectangle 3"/>
+          <p:cNvPr id="8" name="コード背景"/>
           <p:cNvSpPr/>
           <p:nvPr/>
         </p:nvSpPr>
         <p:spPr>
           <a:xfrm>
-            <a:off x="548640" y="1637782"/>
-            <a:ext cx="8046720" cy="1524000"/>
+            <a:off x="548640" y="1944712"/>
+            <a:ext cx="8046720" cy="1500483"/>
           </a:xfrm>
           <a:prstGeom prst="rect">
             <a:avLst/>
@@ -23297,6 +23514,48 @@
           </a:fontRef>
         </p:style>
         <p:txBody>
+          <a:bodyPr rtlCol="0" anchor="ctr"/>
+          <a:lstStyle/>
+          <a:p>
+            <a:pPr algn="ctr"/>
+          </a:p>
+        </p:txBody>
+      </p:sp>
+      <p:sp>
+        <p:nvSpPr>
+          <p:cNvPr id="4" name="Rectangle 3"/>
+          <p:cNvSpPr/>
+          <p:nvPr/>
+        </p:nvSpPr>
+        <p:spPr>
+          <a:xfrm>
+            <a:off x="548640" y="1934558"/>
+            <a:ext cx="8046720" cy="1188591"/>
+          </a:xfrm>
+          <a:prstGeom prst="rect">
+            <a:avLst/>
+          </a:prstGeom>
+          <a:noFill/>
+          <a:ln>
+            <a:noFill/>
+          </a:ln>
+          <a:effectLst/>
+        </p:spPr>
+        <p:style>
+          <a:lnRef idx="1">
+            <a:schemeClr val="accent1"/>
+          </a:lnRef>
+          <a:fillRef idx="3">
+            <a:schemeClr val="accent1"/>
+          </a:fillRef>
+          <a:effectRef idx="0">
+            <a:schemeClr val="accent1"/>
+          </a:effectRef>
+          <a:fontRef idx="minor">
+            <a:schemeClr val="lt1"/>
+          </a:fontRef>
+        </p:style>
+        <p:txBody>
           <a:bodyPr rtlCol="0" anchor="t" wrap="none" lIns="152400" rIns="152400" tIns="92710" bIns="127000"/>
           <a:lstStyle/>
           <a:p>
@@ -23464,7 +23723,7 @@
         </p:nvSpPr>
         <p:spPr>
           <a:xfrm>
-            <a:off x="594360" y="3362950"/>
+            <a:off x="594360" y="3587181"/>
             <a:ext cx="7955279" cy="777240"/>
           </a:xfrm>
           <a:prstGeom prst="rect">
@@ -23606,7 +23865,7 @@
         </p:nvSpPr>
         <p:spPr>
           <a:xfrm>
-            <a:off x="594360" y="1436614"/>
+            <a:off x="594360" y="1650728"/>
             <a:ext cx="7955279" cy="164592"/>
           </a:xfrm>
           <a:prstGeom prst="rect">
@@ -23768,14 +24027,14 @@
       </p:sp>
       <p:sp>
         <p:nvSpPr>
-          <p:cNvPr id="4" name="Rectangle 3"/>
+          <p:cNvPr id="8" name="コード背景"/>
           <p:cNvSpPr/>
           <p:nvPr/>
         </p:nvSpPr>
         <p:spPr>
           <a:xfrm>
-            <a:off x="548640" y="1515913"/>
-            <a:ext cx="8046720" cy="1778000"/>
+            <a:off x="548640" y="1492554"/>
+            <a:ext cx="8046720" cy="1754635"/>
           </a:xfrm>
           <a:prstGeom prst="rect">
             <a:avLst/>
@@ -23803,6 +24062,48 @@
           </a:fontRef>
         </p:style>
         <p:txBody>
+          <a:bodyPr rtlCol="0" anchor="ctr"/>
+          <a:lstStyle/>
+          <a:p>
+            <a:pPr algn="ctr"/>
+          </a:p>
+        </p:txBody>
+      </p:sp>
+      <p:sp>
+        <p:nvSpPr>
+          <p:cNvPr id="4" name="Rectangle 3"/>
+          <p:cNvSpPr/>
+          <p:nvPr/>
+        </p:nvSpPr>
+        <p:spPr>
+          <a:xfrm>
+            <a:off x="548640" y="1482070"/>
+            <a:ext cx="8046720" cy="1773565"/>
+          </a:xfrm>
+          <a:prstGeom prst="rect">
+            <a:avLst/>
+          </a:prstGeom>
+          <a:noFill/>
+          <a:ln>
+            <a:noFill/>
+          </a:ln>
+          <a:effectLst/>
+        </p:spPr>
+        <p:style>
+          <a:lnRef idx="1">
+            <a:schemeClr val="accent1"/>
+          </a:lnRef>
+          <a:fillRef idx="3">
+            <a:schemeClr val="accent1"/>
+          </a:fillRef>
+          <a:effectRef idx="0">
+            <a:schemeClr val="accent1"/>
+          </a:effectRef>
+          <a:fontRef idx="minor">
+            <a:schemeClr val="lt1"/>
+          </a:fontRef>
+        </p:style>
+        <p:txBody>
           <a:bodyPr rtlCol="0" anchor="t" wrap="none" lIns="152400" rIns="152400" tIns="92710" bIns="127000"/>
           <a:lstStyle/>
           <a:p>
@@ -24001,7 +24302,7 @@
         </p:nvSpPr>
         <p:spPr>
           <a:xfrm>
-            <a:off x="594360" y="3495081"/>
+            <a:off x="594360" y="3389062"/>
             <a:ext cx="7955279" cy="777240"/>
           </a:xfrm>
           <a:prstGeom prst="rect">
@@ -24305,14 +24606,14 @@
       </p:sp>
       <p:sp>
         <p:nvSpPr>
-          <p:cNvPr id="4" name="Rectangle 3"/>
+          <p:cNvPr id="8" name="コード背景"/>
           <p:cNvSpPr/>
           <p:nvPr/>
         </p:nvSpPr>
         <p:spPr>
           <a:xfrm>
-            <a:off x="548640" y="1806381"/>
-            <a:ext cx="8046720" cy="1524000"/>
+            <a:off x="548640" y="1944712"/>
+            <a:ext cx="8046720" cy="1500483"/>
           </a:xfrm>
           <a:prstGeom prst="rect">
             <a:avLst/>
@@ -24340,6 +24641,48 @@
           </a:fontRef>
         </p:style>
         <p:txBody>
+          <a:bodyPr rtlCol="0" anchor="ctr"/>
+          <a:lstStyle/>
+          <a:p>
+            <a:pPr algn="ctr"/>
+          </a:p>
+        </p:txBody>
+      </p:sp>
+      <p:sp>
+        <p:nvSpPr>
+          <p:cNvPr id="4" name="Rectangle 3"/>
+          <p:cNvSpPr/>
+          <p:nvPr/>
+        </p:nvSpPr>
+        <p:spPr>
+          <a:xfrm>
+            <a:off x="548640" y="1934317"/>
+            <a:ext cx="8046720" cy="1357678"/>
+          </a:xfrm>
+          <a:prstGeom prst="rect">
+            <a:avLst/>
+          </a:prstGeom>
+          <a:noFill/>
+          <a:ln>
+            <a:noFill/>
+          </a:ln>
+          <a:effectLst/>
+        </p:spPr>
+        <p:style>
+          <a:lnRef idx="1">
+            <a:schemeClr val="accent1"/>
+          </a:lnRef>
+          <a:fillRef idx="3">
+            <a:schemeClr val="accent1"/>
+          </a:fillRef>
+          <a:effectRef idx="0">
+            <a:schemeClr val="accent1"/>
+          </a:effectRef>
+          <a:fontRef idx="minor">
+            <a:schemeClr val="lt1"/>
+          </a:fontRef>
+        </p:style>
+        <p:txBody>
           <a:bodyPr rtlCol="0" anchor="t" wrap="none" lIns="152400" rIns="152400" tIns="92710" bIns="127000"/>
           <a:lstStyle/>
           <a:p>
@@ -24507,7 +24850,7 @@
         </p:nvSpPr>
         <p:spPr>
           <a:xfrm>
-            <a:off x="594360" y="3531549"/>
+            <a:off x="594360" y="3587308"/>
             <a:ext cx="7955279" cy="777240"/>
           </a:xfrm>
           <a:prstGeom prst="rect">
@@ -24649,7 +24992,7 @@
         </p:nvSpPr>
         <p:spPr>
           <a:xfrm>
-            <a:off x="594360" y="1605213"/>
+            <a:off x="594360" y="1650843"/>
             <a:ext cx="7955279" cy="164592"/>
           </a:xfrm>
           <a:prstGeom prst="rect">
@@ -24811,14 +25154,14 @@
       </p:sp>
       <p:sp>
         <p:nvSpPr>
-          <p:cNvPr id="4" name="Rectangle 3"/>
+          <p:cNvPr id="8" name="コード背景"/>
           <p:cNvSpPr/>
           <p:nvPr/>
         </p:nvSpPr>
         <p:spPr>
           <a:xfrm>
-            <a:off x="548640" y="1598005"/>
-            <a:ext cx="8046720" cy="1603375"/>
+            <a:off x="548640" y="1737366"/>
+            <a:ext cx="8046720" cy="1578521"/>
           </a:xfrm>
           <a:prstGeom prst="rect">
             <a:avLst/>
@@ -24846,6 +25189,48 @@
           </a:fontRef>
         </p:style>
         <p:txBody>
+          <a:bodyPr rtlCol="0" anchor="ctr"/>
+          <a:lstStyle/>
+          <a:p>
+            <a:pPr algn="ctr"/>
+          </a:p>
+        </p:txBody>
+      </p:sp>
+      <p:sp>
+        <p:nvSpPr>
+          <p:cNvPr id="4" name="Rectangle 3"/>
+          <p:cNvSpPr/>
+          <p:nvPr/>
+        </p:nvSpPr>
+        <p:spPr>
+          <a:xfrm>
+            <a:off x="548640" y="1724595"/>
+            <a:ext cx="8046720" cy="1439172"/>
+          </a:xfrm>
+          <a:prstGeom prst="rect">
+            <a:avLst/>
+          </a:prstGeom>
+          <a:noFill/>
+          <a:ln>
+            <a:noFill/>
+          </a:ln>
+          <a:effectLst/>
+        </p:spPr>
+        <p:style>
+          <a:lnRef idx="1">
+            <a:schemeClr val="accent1"/>
+          </a:lnRef>
+          <a:fillRef idx="3">
+            <a:schemeClr val="accent1"/>
+          </a:fillRef>
+          <a:effectRef idx="0">
+            <a:schemeClr val="accent1"/>
+          </a:effectRef>
+          <a:fontRef idx="minor">
+            <a:schemeClr val="lt1"/>
+          </a:fontRef>
+        </p:style>
+        <p:txBody>
           <a:bodyPr rtlCol="0" anchor="t" wrap="none" lIns="152400" rIns="152400" tIns="92710" bIns="127000"/>
           <a:lstStyle/>
           <a:p>
@@ -25013,7 +25398,7 @@
         </p:nvSpPr>
         <p:spPr>
           <a:xfrm>
-            <a:off x="594360" y="3402548"/>
+            <a:off x="594360" y="3457613"/>
             <a:ext cx="7955279" cy="777240"/>
           </a:xfrm>
           <a:prstGeom prst="rect">
@@ -25155,7 +25540,7 @@
         </p:nvSpPr>
         <p:spPr>
           <a:xfrm>
-            <a:off x="594360" y="1396837"/>
+            <a:off x="594360" y="1443300"/>
             <a:ext cx="7955279" cy="164592"/>
           </a:xfrm>
           <a:prstGeom prst="rect">
@@ -34132,7 +34517,7 @@
         </p:nvSpPr>
         <p:spPr>
           <a:xfrm>
-            <a:off x="594360" y="1417320"/>
+            <a:off x="594360" y="1848583"/>
             <a:ext cx="7955279" cy="201168"/>
           </a:xfrm>
           <a:prstGeom prst="rect">
@@ -34186,7 +34571,7 @@
         </p:nvSpPr>
         <p:spPr>
           <a:xfrm>
-            <a:off x="594360" y="1773936"/>
+            <a:off x="594360" y="2138543"/>
             <a:ext cx="7955279" cy="1463040"/>
           </a:xfrm>
           <a:prstGeom prst="rect">
@@ -34240,7 +34625,7 @@
         </p:nvSpPr>
         <p:spPr>
           <a:xfrm>
-            <a:off x="594360" y="3429000"/>
+            <a:off x="594360" y="3309595"/>
             <a:ext cx="7955279" cy="1051560"/>
           </a:xfrm>
           <a:prstGeom prst="rect">

--- a/slides/datasets-in-10-minutes-scicode.pptx
+++ b/slides/datasets-in-10-minutes-scicode.pptx
@@ -8025,7 +8025,7 @@
                 <a:ea typeface="Noto Sans CJK JP"/>
                 <a:cs typeface="Noto Sans"/>
               </a:rPr>
-              <a:t>Lennard–Jonesポテンシャルは、2原子の距離から相互作用のエネルギーを求める。σは値が0となる距離、εは井戸の深さを表す。</a:t>
+              <a:t>Lennard–Jonesポテンシャルは、2原子間の距離から相互作用エネルギーを計算する。σは値が0となる距離、εは井戸の深さを表す。</a:t>
             </a:r>
           </a:p>
         </p:txBody>
@@ -10218,7 +10218,7 @@
                 <a:ea typeface="Noto Sans CJK JP"/>
                 <a:cs typeface="Noto Sans"/>
               </a:rPr>
-              <a:t>例：2次元Isingモデルの相転移温度や、</a:t>
+              <a:t>分野固有の検証の例：2次元Isingモデルの相転移温度や、</a:t>
             </a:r>
           </a:p>
           <a:p>
@@ -10875,7 +10875,7 @@
                 <a:ea typeface="Noto Sans CJK JP"/>
                 <a:cs typeface="Noto Sans"/>
               </a:rPr>
-              <a:t>標準設定は、科学的な背景説明を与えず、前段階にはモデル自身が生成したコードを使う。</a:t>
+              <a:t>標準設定では、科学的な背景説明を与えず、前段階にはモデル自身が生成したコードを使う。</a:t>
             </a:r>
           </a:p>
         </p:txBody>
@@ -13838,7 +13838,7 @@
                 <a:spcPts val="2640"/>
               </a:lnSpc>
               <a:spcAft>
-                <a:spcPts val="800"/>
+                <a:spcPts val="0"/>
               </a:spcAft>
               <a:buSzPct val="60455"/>
               <a:buFont typeface="Noto Sans CJK JP"/>
@@ -13859,7 +13859,7 @@
                 <a:ea typeface="Noto Sans CJK JP"/>
                 <a:cs typeface="Noto Sans"/>
               </a:rPr>
-              <a:t>背景説明ありでは、科学者が書いた科学的な知識や計算手順をプロンプトへ加える。なしでは、モデル自身が必要な知識を補う。</a:t>
+              <a:t>背景説明の有無と、前段階のコードの出所という2つの軸で、科学知識とコード生成を調べる。</a:t>
             </a:r>
           </a:p>
           <a:p>
@@ -13889,7 +13889,7 @@
                 <a:ea typeface="Noto Sans CJK JP"/>
                 <a:cs typeface="Noto Sans"/>
               </a:rPr>
-              <a:t>前段階に参照解を使う設定では、対象の部分問題の実装能力に焦点を当てる。生成コードを使う設定では、前の段階からの誤りも引き継ぐ。</a:t>
+              <a:t>背景説明ありでは、科学者が書いた科学的な知識や計算手順をプロンプトへ加える。なしでは、モデル自身が必要な知識を補う。</a:t>
             </a:r>
           </a:p>
           <a:p>
@@ -13898,7 +13898,7 @@
                 <a:spcPts val="2640"/>
               </a:lnSpc>
               <a:spcAft>
-                <a:spcPts val="0"/>
+                <a:spcPts val="800"/>
               </a:spcAft>
               <a:buSzPct val="60455"/>
               <a:buFont typeface="Noto Sans CJK JP"/>
@@ -13919,7 +13919,7 @@
                 <a:ea typeface="Noto Sans CJK JP"/>
                 <a:cs typeface="Noto Sans"/>
               </a:rPr>
-              <a:t>背景説明の有無と、前段階のコードの出所という2つの軸で、科学知識とコード生成を調べる。</a:t>
+              <a:t>前段階に参照解を使う設定では、対象の部分問題の実装能力に焦点を当てる。生成コードを使う設定では、前の段階からの誤りも引き継ぐ。</a:t>
             </a:r>
           </a:p>
         </p:txBody>
@@ -15523,7 +15523,7 @@
                 <a:ea typeface="Noto Sans CJK JP"/>
                 <a:cs typeface="Noto Sans"/>
               </a:rPr>
-              <a:t>80主課題は5分野にまたがる</a:t>
+              <a:t>80の主課題は5分野にまたがる</a:t>
             </a:r>
           </a:p>
         </p:txBody>
@@ -17014,7 +17014,7 @@
         </p:nvSpPr>
         <p:spPr>
           <a:xfrm>
-            <a:off x="594360" y="4096512"/>
+            <a:off x="594360" y="4007612"/>
             <a:ext cx="7955279" cy="420624"/>
           </a:xfrm>
           <a:prstGeom prst="rect">
@@ -17055,7 +17055,7 @@
                 <a:ea typeface="Noto Sans CJK JP"/>
                 <a:cs typeface="Noto Sans"/>
               </a:rPr>
-              <a:t>80主課題を集計。固定コード3件を除き、生成する段階数で分類。</a:t>
+              <a:t>縦軸は主課題数。80主課題を集計し、固定コードの3段階を除いた生成段階数で分類する。</a:t>
             </a:r>
           </a:p>
         </p:txBody>
@@ -18761,7 +18761,7 @@
                 <a:ea typeface="Noto Sans CJK JP"/>
                 <a:cs typeface="Noto Sans"/>
               </a:rPr>
-              <a:t>3段階は固定コードを後続の計算へ渡す</a:t>
+              <a:t>3つの段階で、固定コードを後続の計算へ渡す</a:t>
             </a:r>
           </a:p>
         </p:txBody>
@@ -19557,7 +19557,7 @@
                 <a:ea typeface="Noto Sans CJK JP"/>
                 <a:cs typeface="Noto Sans"/>
               </a:rPr>
-              <a:t>SciCodeは、科学者が作成した80主課題から、338の生成対象の部分問題を構成する。</a:t>
+              <a:t>SciCodeは、科学者が作成した80の主課題を、生成対象となる338の部分問題に分けたものである。</a:t>
             </a:r>
           </a:p>
           <a:p>
@@ -27795,7 +27795,7 @@
                 <a:ea typeface="Noto Sans CJK JP"/>
                 <a:cs typeface="Noto Sans"/>
               </a:rPr>
-              <a:t>数学・物理・化学・生物・材料科学の5分野にわたる80の主課題を、338の生成対象の部分問題へ分けている。</a:t>
+              <a:t>数学・物理・化学・生物・材料科学の5分野にわたる80の主課題を、生成対象となる338の部分問題に分けている。</a:t>
             </a:r>
           </a:p>
           <a:p>
@@ -33013,7 +33013,7 @@
                 <a:ea typeface="Noto Sans CJK JP"/>
                 <a:cs typeface="Noto Sans"/>
               </a:rPr>
-              <a:t>一つの研究課題を、複数の関数へ分ける</a:t>
+              <a:t>Gram–Schmidt直交化を複数の関数に分ける</a:t>
             </a:r>
           </a:p>
         </p:txBody>
@@ -34435,7 +34435,7 @@
                 <a:ea typeface="Noto Sans CJK JP"/>
                 <a:cs typeface="Noto Sans"/>
               </a:rPr>
-              <a:t>正規化：入力[3, 4]を[0.6, 0.8]へ変える</a:t>
+              <a:t>正規化：入力[3, 4]を[0.6, 0.8]に変換する</a:t>
             </a:r>
           </a:p>
         </p:txBody>
@@ -34702,7 +34702,7 @@
                 <a:ea typeface="Noto Sans CJK JP"/>
                 <a:cs typeface="Noto Sans"/>
               </a:rPr>
-              <a:t>配布テストの入力はv = [3, 4]。参照解を実行すると[0.6, 0.8]となる。参照解はノルムで割り、ゼロベクトルは変更しない。</a:t>
+              <a:t>配布テストの入力はv = [3, 4]。参照解を実行すると[0.6, 0.8]となる。参照解ではノルムで割り、ゼロベクトルは変更しない。</a:t>
             </a:r>
           </a:p>
         </p:txBody>
